--- a/71心靈平安.pptx
+++ b/71心靈平安.pptx
@@ -9,7 +9,7 @@
     <p:sldId id="263" r:id="rId3"/>
     <p:sldId id="264" r:id="rId4"/>
     <p:sldId id="265" r:id="rId5"/>
-    <p:sldId id="267" r:id="rId6"/>
+    <p:sldId id="593" r:id="rId6"/>
   </p:sldIdLst>
   <p:sldSz cx="12192000" cy="6858000"/>
   <p:notesSz cx="6858000" cy="9144000"/>
@@ -165,7 +165,7 @@
           <a:lstStyle/>
           <a:p>
             <a:r>
-              <a:rPr lang="en-US" altLang="zh-TW" smtClean="0"/>
+              <a:rPr lang="en-US" altLang="zh-TW"/>
               <a:t>Click to edit Master title style</a:t>
             </a:r>
             <a:endParaRPr lang="zh-TW" altLang="en-US"/>
@@ -284,7 +284,7 @@
           </a:lstStyle>
           <a:p>
             <a:r>
-              <a:rPr lang="en-US" altLang="zh-TW" smtClean="0"/>
+              <a:rPr lang="en-US" altLang="zh-TW"/>
               <a:t>Click to edit Master subtitle style</a:t>
             </a:r>
             <a:endParaRPr lang="zh-TW" altLang="en-US"/>
@@ -309,7 +309,7 @@
             <a:fld id="{74BC4726-2204-402F-8651-3DE2807316DF}" type="datetimeFigureOut">
               <a:rPr lang="en-US" smtClean="0"/>
               <a:pPr/>
-              <a:t>8/22/2020</a:t>
+              <a:t>7/31/2026</a:t>
             </a:fld>
             <a:endParaRPr lang="en-US"/>
           </a:p>
@@ -404,7 +404,7 @@
           <a:lstStyle/>
           <a:p>
             <a:r>
-              <a:rPr lang="en-US" altLang="zh-TW" smtClean="0"/>
+              <a:rPr lang="en-US" altLang="zh-TW"/>
               <a:t>Click to edit Master title style</a:t>
             </a:r>
             <a:endParaRPr lang="zh-TW" altLang="en-US"/>
@@ -428,35 +428,35 @@
           <a:p>
             <a:pPr lvl="0"/>
             <a:r>
-              <a:rPr lang="en-US" altLang="zh-TW" smtClean="0"/>
+              <a:rPr lang="en-US" altLang="zh-TW"/>
               <a:t>Edit Master text styles</a:t>
             </a:r>
           </a:p>
           <a:p>
             <a:pPr lvl="1"/>
             <a:r>
-              <a:rPr lang="en-US" altLang="zh-TW" smtClean="0"/>
+              <a:rPr lang="en-US" altLang="zh-TW"/>
               <a:t>Second level</a:t>
             </a:r>
           </a:p>
           <a:p>
             <a:pPr lvl="2"/>
             <a:r>
-              <a:rPr lang="en-US" altLang="zh-TW" smtClean="0"/>
+              <a:rPr lang="en-US" altLang="zh-TW"/>
               <a:t>Third level</a:t>
             </a:r>
           </a:p>
           <a:p>
             <a:pPr lvl="3"/>
             <a:r>
-              <a:rPr lang="en-US" altLang="zh-TW" smtClean="0"/>
+              <a:rPr lang="en-US" altLang="zh-TW"/>
               <a:t>Fourth level</a:t>
             </a:r>
           </a:p>
           <a:p>
             <a:pPr lvl="4"/>
             <a:r>
-              <a:rPr lang="en-US" altLang="zh-TW" smtClean="0"/>
+              <a:rPr lang="en-US" altLang="zh-TW"/>
               <a:t>Fifth level</a:t>
             </a:r>
             <a:endParaRPr lang="zh-TW" altLang="en-US"/>
@@ -481,7 +481,7 @@
             <a:fld id="{74BC4726-2204-402F-8651-3DE2807316DF}" type="datetimeFigureOut">
               <a:rPr lang="en-US" smtClean="0"/>
               <a:pPr/>
-              <a:t>8/22/2020</a:t>
+              <a:t>7/31/2026</a:t>
             </a:fld>
             <a:endParaRPr lang="en-US"/>
           </a:p>
@@ -581,7 +581,7 @@
           <a:lstStyle/>
           <a:p>
             <a:r>
-              <a:rPr lang="en-US" altLang="zh-TW" smtClean="0"/>
+              <a:rPr lang="en-US" altLang="zh-TW"/>
               <a:t>Click to edit Master title style</a:t>
             </a:r>
             <a:endParaRPr lang="zh-TW" altLang="en-US"/>
@@ -610,35 +610,35 @@
           <a:p>
             <a:pPr lvl="0"/>
             <a:r>
-              <a:rPr lang="en-US" altLang="zh-TW" smtClean="0"/>
+              <a:rPr lang="en-US" altLang="zh-TW"/>
               <a:t>Edit Master text styles</a:t>
             </a:r>
           </a:p>
           <a:p>
             <a:pPr lvl="1"/>
             <a:r>
-              <a:rPr lang="en-US" altLang="zh-TW" smtClean="0"/>
+              <a:rPr lang="en-US" altLang="zh-TW"/>
               <a:t>Second level</a:t>
             </a:r>
           </a:p>
           <a:p>
             <a:pPr lvl="2"/>
             <a:r>
-              <a:rPr lang="en-US" altLang="zh-TW" smtClean="0"/>
+              <a:rPr lang="en-US" altLang="zh-TW"/>
               <a:t>Third level</a:t>
             </a:r>
           </a:p>
           <a:p>
             <a:pPr lvl="3"/>
             <a:r>
-              <a:rPr lang="en-US" altLang="zh-TW" smtClean="0"/>
+              <a:rPr lang="en-US" altLang="zh-TW"/>
               <a:t>Fourth level</a:t>
             </a:r>
           </a:p>
           <a:p>
             <a:pPr lvl="4"/>
             <a:r>
-              <a:rPr lang="en-US" altLang="zh-TW" smtClean="0"/>
+              <a:rPr lang="en-US" altLang="zh-TW"/>
               <a:t>Fifth level</a:t>
             </a:r>
             <a:endParaRPr lang="zh-TW" altLang="en-US"/>
@@ -663,7 +663,7 @@
             <a:fld id="{74BC4726-2204-402F-8651-3DE2807316DF}" type="datetimeFigureOut">
               <a:rPr lang="en-US" smtClean="0"/>
               <a:pPr/>
-              <a:t>8/22/2020</a:t>
+              <a:t>7/31/2026</a:t>
             </a:fld>
             <a:endParaRPr lang="en-US"/>
           </a:p>
@@ -758,7 +758,7 @@
           <a:lstStyle/>
           <a:p>
             <a:r>
-              <a:rPr lang="en-US" altLang="zh-TW" smtClean="0"/>
+              <a:rPr lang="en-US" altLang="zh-TW"/>
               <a:t>Click to edit Master title style</a:t>
             </a:r>
             <a:endParaRPr lang="zh-TW" altLang="en-US"/>
@@ -782,35 +782,35 @@
           <a:p>
             <a:pPr lvl="0"/>
             <a:r>
-              <a:rPr lang="en-US" altLang="zh-TW" smtClean="0"/>
+              <a:rPr lang="en-US" altLang="zh-TW"/>
               <a:t>Edit Master text styles</a:t>
             </a:r>
           </a:p>
           <a:p>
             <a:pPr lvl="1"/>
             <a:r>
-              <a:rPr lang="en-US" altLang="zh-TW" smtClean="0"/>
+              <a:rPr lang="en-US" altLang="zh-TW"/>
               <a:t>Second level</a:t>
             </a:r>
           </a:p>
           <a:p>
             <a:pPr lvl="2"/>
             <a:r>
-              <a:rPr lang="en-US" altLang="zh-TW" smtClean="0"/>
+              <a:rPr lang="en-US" altLang="zh-TW"/>
               <a:t>Third level</a:t>
             </a:r>
           </a:p>
           <a:p>
             <a:pPr lvl="3"/>
             <a:r>
-              <a:rPr lang="en-US" altLang="zh-TW" smtClean="0"/>
+              <a:rPr lang="en-US" altLang="zh-TW"/>
               <a:t>Fourth level</a:t>
             </a:r>
           </a:p>
           <a:p>
             <a:pPr lvl="4"/>
             <a:r>
-              <a:rPr lang="en-US" altLang="zh-TW" smtClean="0"/>
+              <a:rPr lang="en-US" altLang="zh-TW"/>
               <a:t>Fifth level</a:t>
             </a:r>
             <a:endParaRPr lang="zh-TW" altLang="en-US"/>
@@ -835,7 +835,7 @@
             <a:fld id="{74BC4726-2204-402F-8651-3DE2807316DF}" type="datetimeFigureOut">
               <a:rPr lang="en-US" smtClean="0"/>
               <a:pPr/>
-              <a:t>8/22/2020</a:t>
+              <a:t>7/31/2026</a:t>
             </a:fld>
             <a:endParaRPr lang="en-US"/>
           </a:p>
@@ -939,7 +939,7 @@
           </a:lstStyle>
           <a:p>
             <a:r>
-              <a:rPr lang="en-US" altLang="zh-TW" smtClean="0"/>
+              <a:rPr lang="en-US" altLang="zh-TW"/>
               <a:t>Click to edit Master title style</a:t>
             </a:r>
             <a:endParaRPr lang="zh-TW" altLang="en-US"/>
@@ -1059,7 +1059,7 @@
           <a:p>
             <a:pPr lvl="0"/>
             <a:r>
-              <a:rPr lang="en-US" altLang="zh-TW" smtClean="0"/>
+              <a:rPr lang="en-US" altLang="zh-TW"/>
               <a:t>Edit Master text styles</a:t>
             </a:r>
           </a:p>
@@ -1083,7 +1083,7 @@
             <a:fld id="{74BC4726-2204-402F-8651-3DE2807316DF}" type="datetimeFigureOut">
               <a:rPr lang="en-US" smtClean="0"/>
               <a:pPr/>
-              <a:t>8/22/2020</a:t>
+              <a:t>7/31/2026</a:t>
             </a:fld>
             <a:endParaRPr lang="en-US"/>
           </a:p>
@@ -1178,7 +1178,7 @@
           <a:lstStyle/>
           <a:p>
             <a:r>
-              <a:rPr lang="en-US" altLang="zh-TW" smtClean="0"/>
+              <a:rPr lang="en-US" altLang="zh-TW"/>
               <a:t>Click to edit Master title style</a:t>
             </a:r>
             <a:endParaRPr lang="zh-TW" altLang="en-US"/>
@@ -1235,35 +1235,35 @@
           <a:p>
             <a:pPr lvl="0"/>
             <a:r>
-              <a:rPr lang="en-US" altLang="zh-TW" smtClean="0"/>
+              <a:rPr lang="en-US" altLang="zh-TW"/>
               <a:t>Edit Master text styles</a:t>
             </a:r>
           </a:p>
           <a:p>
             <a:pPr lvl="1"/>
             <a:r>
-              <a:rPr lang="en-US" altLang="zh-TW" smtClean="0"/>
+              <a:rPr lang="en-US" altLang="zh-TW"/>
               <a:t>Second level</a:t>
             </a:r>
           </a:p>
           <a:p>
             <a:pPr lvl="2"/>
             <a:r>
-              <a:rPr lang="en-US" altLang="zh-TW" smtClean="0"/>
+              <a:rPr lang="en-US" altLang="zh-TW"/>
               <a:t>Third level</a:t>
             </a:r>
           </a:p>
           <a:p>
             <a:pPr lvl="3"/>
             <a:r>
-              <a:rPr lang="en-US" altLang="zh-TW" smtClean="0"/>
+              <a:rPr lang="en-US" altLang="zh-TW"/>
               <a:t>Fourth level</a:t>
             </a:r>
           </a:p>
           <a:p>
             <a:pPr lvl="4"/>
             <a:r>
-              <a:rPr lang="en-US" altLang="zh-TW" smtClean="0"/>
+              <a:rPr lang="en-US" altLang="zh-TW"/>
               <a:t>Fifth level</a:t>
             </a:r>
             <a:endParaRPr lang="zh-TW" altLang="en-US"/>
@@ -1320,35 +1320,35 @@
           <a:p>
             <a:pPr lvl="0"/>
             <a:r>
-              <a:rPr lang="en-US" altLang="zh-TW" smtClean="0"/>
+              <a:rPr lang="en-US" altLang="zh-TW"/>
               <a:t>Edit Master text styles</a:t>
             </a:r>
           </a:p>
           <a:p>
             <a:pPr lvl="1"/>
             <a:r>
-              <a:rPr lang="en-US" altLang="zh-TW" smtClean="0"/>
+              <a:rPr lang="en-US" altLang="zh-TW"/>
               <a:t>Second level</a:t>
             </a:r>
           </a:p>
           <a:p>
             <a:pPr lvl="2"/>
             <a:r>
-              <a:rPr lang="en-US" altLang="zh-TW" smtClean="0"/>
+              <a:rPr lang="en-US" altLang="zh-TW"/>
               <a:t>Third level</a:t>
             </a:r>
           </a:p>
           <a:p>
             <a:pPr lvl="3"/>
             <a:r>
-              <a:rPr lang="en-US" altLang="zh-TW" smtClean="0"/>
+              <a:rPr lang="en-US" altLang="zh-TW"/>
               <a:t>Fourth level</a:t>
             </a:r>
           </a:p>
           <a:p>
             <a:pPr lvl="4"/>
             <a:r>
-              <a:rPr lang="en-US" altLang="zh-TW" smtClean="0"/>
+              <a:rPr lang="en-US" altLang="zh-TW"/>
               <a:t>Fifth level</a:t>
             </a:r>
             <a:endParaRPr lang="zh-TW" altLang="en-US"/>
@@ -1373,7 +1373,7 @@
             <a:fld id="{74BC4726-2204-402F-8651-3DE2807316DF}" type="datetimeFigureOut">
               <a:rPr lang="en-US" smtClean="0"/>
               <a:pPr/>
-              <a:t>8/22/2020</a:t>
+              <a:t>7/31/2026</a:t>
             </a:fld>
             <a:endParaRPr lang="en-US"/>
           </a:p>
@@ -1472,7 +1472,7 @@
           </a:lstStyle>
           <a:p>
             <a:r>
-              <a:rPr lang="en-US" altLang="zh-TW" smtClean="0"/>
+              <a:rPr lang="en-US" altLang="zh-TW"/>
               <a:t>Click to edit Master title style</a:t>
             </a:r>
             <a:endParaRPr lang="zh-TW" altLang="en-US"/>
@@ -1538,7 +1538,7 @@
           <a:p>
             <a:pPr lvl="0"/>
             <a:r>
-              <a:rPr lang="en-US" altLang="zh-TW" smtClean="0"/>
+              <a:rPr lang="en-US" altLang="zh-TW"/>
               <a:t>Edit Master text styles</a:t>
             </a:r>
           </a:p>
@@ -1594,35 +1594,35 @@
           <a:p>
             <a:pPr lvl="0"/>
             <a:r>
-              <a:rPr lang="en-US" altLang="zh-TW" smtClean="0"/>
+              <a:rPr lang="en-US" altLang="zh-TW"/>
               <a:t>Edit Master text styles</a:t>
             </a:r>
           </a:p>
           <a:p>
             <a:pPr lvl="1"/>
             <a:r>
-              <a:rPr lang="en-US" altLang="zh-TW" smtClean="0"/>
+              <a:rPr lang="en-US" altLang="zh-TW"/>
               <a:t>Second level</a:t>
             </a:r>
           </a:p>
           <a:p>
             <a:pPr lvl="2"/>
             <a:r>
-              <a:rPr lang="en-US" altLang="zh-TW" smtClean="0"/>
+              <a:rPr lang="en-US" altLang="zh-TW"/>
               <a:t>Third level</a:t>
             </a:r>
           </a:p>
           <a:p>
             <a:pPr lvl="3"/>
             <a:r>
-              <a:rPr lang="en-US" altLang="zh-TW" smtClean="0"/>
+              <a:rPr lang="en-US" altLang="zh-TW"/>
               <a:t>Fourth level</a:t>
             </a:r>
           </a:p>
           <a:p>
             <a:pPr lvl="4"/>
             <a:r>
-              <a:rPr lang="en-US" altLang="zh-TW" smtClean="0"/>
+              <a:rPr lang="en-US" altLang="zh-TW"/>
               <a:t>Fifth level</a:t>
             </a:r>
             <a:endParaRPr lang="zh-TW" altLang="en-US"/>
@@ -1688,7 +1688,7 @@
           <a:p>
             <a:pPr lvl="0"/>
             <a:r>
-              <a:rPr lang="en-US" altLang="zh-TW" smtClean="0"/>
+              <a:rPr lang="en-US" altLang="zh-TW"/>
               <a:t>Edit Master text styles</a:t>
             </a:r>
           </a:p>
@@ -1744,35 +1744,35 @@
           <a:p>
             <a:pPr lvl="0"/>
             <a:r>
-              <a:rPr lang="en-US" altLang="zh-TW" smtClean="0"/>
+              <a:rPr lang="en-US" altLang="zh-TW"/>
               <a:t>Edit Master text styles</a:t>
             </a:r>
           </a:p>
           <a:p>
             <a:pPr lvl="1"/>
             <a:r>
-              <a:rPr lang="en-US" altLang="zh-TW" smtClean="0"/>
+              <a:rPr lang="en-US" altLang="zh-TW"/>
               <a:t>Second level</a:t>
             </a:r>
           </a:p>
           <a:p>
             <a:pPr lvl="2"/>
             <a:r>
-              <a:rPr lang="en-US" altLang="zh-TW" smtClean="0"/>
+              <a:rPr lang="en-US" altLang="zh-TW"/>
               <a:t>Third level</a:t>
             </a:r>
           </a:p>
           <a:p>
             <a:pPr lvl="3"/>
             <a:r>
-              <a:rPr lang="en-US" altLang="zh-TW" smtClean="0"/>
+              <a:rPr lang="en-US" altLang="zh-TW"/>
               <a:t>Fourth level</a:t>
             </a:r>
           </a:p>
           <a:p>
             <a:pPr lvl="4"/>
             <a:r>
-              <a:rPr lang="en-US" altLang="zh-TW" smtClean="0"/>
+              <a:rPr lang="en-US" altLang="zh-TW"/>
               <a:t>Fifth level</a:t>
             </a:r>
             <a:endParaRPr lang="zh-TW" altLang="en-US"/>
@@ -1797,7 +1797,7 @@
             <a:fld id="{74BC4726-2204-402F-8651-3DE2807316DF}" type="datetimeFigureOut">
               <a:rPr lang="en-US" smtClean="0"/>
               <a:pPr/>
-              <a:t>8/22/2020</a:t>
+              <a:t>7/31/2026</a:t>
             </a:fld>
             <a:endParaRPr lang="en-US"/>
           </a:p>
@@ -1892,7 +1892,7 @@
           <a:lstStyle/>
           <a:p>
             <a:r>
-              <a:rPr lang="en-US" altLang="zh-TW" smtClean="0"/>
+              <a:rPr lang="en-US" altLang="zh-TW"/>
               <a:t>Click to edit Master title style</a:t>
             </a:r>
             <a:endParaRPr lang="zh-TW" altLang="en-US"/>
@@ -1917,7 +1917,7 @@
             <a:fld id="{74BC4726-2204-402F-8651-3DE2807316DF}" type="datetimeFigureOut">
               <a:rPr lang="en-US" smtClean="0"/>
               <a:pPr/>
-              <a:t>8/22/2020</a:t>
+              <a:t>7/31/2026</a:t>
             </a:fld>
             <a:endParaRPr lang="en-US"/>
           </a:p>
@@ -2014,7 +2014,7 @@
             <a:fld id="{74BC4726-2204-402F-8651-3DE2807316DF}" type="datetimeFigureOut">
               <a:rPr lang="en-US" smtClean="0"/>
               <a:pPr/>
-              <a:t>8/22/2020</a:t>
+              <a:t>7/31/2026</a:t>
             </a:fld>
             <a:endParaRPr lang="en-US"/>
           </a:p>
@@ -2118,7 +2118,7 @@
           </a:lstStyle>
           <a:p>
             <a:r>
-              <a:rPr lang="en-US" altLang="zh-TW" smtClean="0"/>
+              <a:rPr lang="en-US" altLang="zh-TW"/>
               <a:t>Click to edit Master title style</a:t>
             </a:r>
             <a:endParaRPr lang="zh-TW" altLang="en-US"/>
@@ -2175,35 +2175,35 @@
           <a:p>
             <a:pPr lvl="0"/>
             <a:r>
-              <a:rPr lang="en-US" altLang="zh-TW" smtClean="0"/>
+              <a:rPr lang="en-US" altLang="zh-TW"/>
               <a:t>Edit Master text styles</a:t>
             </a:r>
           </a:p>
           <a:p>
             <a:pPr lvl="1"/>
             <a:r>
-              <a:rPr lang="en-US" altLang="zh-TW" smtClean="0"/>
+              <a:rPr lang="en-US" altLang="zh-TW"/>
               <a:t>Second level</a:t>
             </a:r>
           </a:p>
           <a:p>
             <a:pPr lvl="2"/>
             <a:r>
-              <a:rPr lang="en-US" altLang="zh-TW" smtClean="0"/>
+              <a:rPr lang="en-US" altLang="zh-TW"/>
               <a:t>Third level</a:t>
             </a:r>
           </a:p>
           <a:p>
             <a:pPr lvl="3"/>
             <a:r>
-              <a:rPr lang="en-US" altLang="zh-TW" smtClean="0"/>
+              <a:rPr lang="en-US" altLang="zh-TW"/>
               <a:t>Fourth level</a:t>
             </a:r>
           </a:p>
           <a:p>
             <a:pPr lvl="4"/>
             <a:r>
-              <a:rPr lang="en-US" altLang="zh-TW" smtClean="0"/>
+              <a:rPr lang="en-US" altLang="zh-TW"/>
               <a:t>Fifth level</a:t>
             </a:r>
             <a:endParaRPr lang="zh-TW" altLang="en-US"/>
@@ -2269,7 +2269,7 @@
           <a:p>
             <a:pPr lvl="0"/>
             <a:r>
-              <a:rPr lang="en-US" altLang="zh-TW" smtClean="0"/>
+              <a:rPr lang="en-US" altLang="zh-TW"/>
               <a:t>Edit Master text styles</a:t>
             </a:r>
           </a:p>
@@ -2293,7 +2293,7 @@
             <a:fld id="{74BC4726-2204-402F-8651-3DE2807316DF}" type="datetimeFigureOut">
               <a:rPr lang="en-US" smtClean="0"/>
               <a:pPr/>
-              <a:t>8/22/2020</a:t>
+              <a:t>7/31/2026</a:t>
             </a:fld>
             <a:endParaRPr lang="en-US"/>
           </a:p>
@@ -2397,7 +2397,7 @@
           </a:lstStyle>
           <a:p>
             <a:r>
-              <a:rPr lang="en-US" altLang="zh-TW" smtClean="0"/>
+              <a:rPr lang="en-US" altLang="zh-TW"/>
               <a:t>Click to edit Master title style</a:t>
             </a:r>
             <a:endParaRPr lang="zh-TW" altLang="en-US"/>
@@ -2462,7 +2462,7 @@
           </a:lstStyle>
           <a:p>
             <a:r>
-              <a:rPr lang="en-US" altLang="zh-TW" smtClean="0"/>
+              <a:rPr lang="en-US" altLang="zh-TW"/>
               <a:t>Click icon to add picture</a:t>
             </a:r>
             <a:endParaRPr lang="zh-TW" altLang="en-US"/>
@@ -2528,7 +2528,7 @@
           <a:p>
             <a:pPr lvl="0"/>
             <a:r>
-              <a:rPr lang="en-US" altLang="zh-TW" smtClean="0"/>
+              <a:rPr lang="en-US" altLang="zh-TW"/>
               <a:t>Edit Master text styles</a:t>
             </a:r>
           </a:p>
@@ -2552,7 +2552,7 @@
             <a:fld id="{74BC4726-2204-402F-8651-3DE2807316DF}" type="datetimeFigureOut">
               <a:rPr lang="en-US" smtClean="0"/>
               <a:pPr/>
-              <a:t>8/22/2020</a:t>
+              <a:t>7/31/2026</a:t>
             </a:fld>
             <a:endParaRPr lang="en-US"/>
           </a:p>
@@ -2667,10 +2667,9 @@
           <a:lstStyle/>
           <a:p>
             <a:r>
-              <a:rPr lang="zh-TW" altLang="en-US" smtClean="0"/>
+              <a:rPr lang="zh-TW" altLang="en-US"/>
               <a:t>按一下以編輯母片標題樣式</a:t>
             </a:r>
-            <a:endParaRPr lang="zh-TW" altLang="en-US"/>
           </a:p>
         </p:txBody>
       </p:sp>
@@ -2701,38 +2700,37 @@
           <a:p>
             <a:pPr lvl="0"/>
             <a:r>
-              <a:rPr lang="zh-TW" altLang="en-US" smtClean="0"/>
+              <a:rPr lang="zh-TW" altLang="en-US"/>
               <a:t>按一下以編輯母片文字樣式</a:t>
             </a:r>
           </a:p>
           <a:p>
             <a:pPr lvl="1"/>
             <a:r>
-              <a:rPr lang="zh-TW" altLang="en-US" smtClean="0"/>
+              <a:rPr lang="zh-TW" altLang="en-US"/>
               <a:t>第二層</a:t>
             </a:r>
           </a:p>
           <a:p>
             <a:pPr lvl="2"/>
             <a:r>
-              <a:rPr lang="zh-TW" altLang="en-US" smtClean="0"/>
+              <a:rPr lang="zh-TW" altLang="en-US"/>
               <a:t>第三層</a:t>
             </a:r>
           </a:p>
           <a:p>
             <a:pPr lvl="3"/>
             <a:r>
-              <a:rPr lang="zh-TW" altLang="en-US" smtClean="0"/>
+              <a:rPr lang="zh-TW" altLang="en-US"/>
               <a:t>第四層</a:t>
             </a:r>
           </a:p>
           <a:p>
             <a:pPr lvl="4"/>
             <a:r>
-              <a:rPr lang="zh-TW" altLang="en-US" smtClean="0"/>
+              <a:rPr lang="zh-TW" altLang="en-US"/>
               <a:t>第五層</a:t>
             </a:r>
-            <a:endParaRPr lang="zh-TW" altLang="en-US"/>
           </a:p>
         </p:txBody>
       </p:sp>
@@ -2772,7 +2770,7 @@
             <a:fld id="{74BC4726-2204-402F-8651-3DE2807316DF}" type="datetimeFigureOut">
               <a:rPr lang="en-US" smtClean="0"/>
               <a:pPr/>
-              <a:t>8/22/2020</a:t>
+              <a:t>7/31/2026</a:t>
             </a:fld>
             <a:endParaRPr lang="en-US"/>
           </a:p>
@@ -3217,7 +3215,7 @@
           <a:lstStyle/>
           <a:p>
             <a:r>
-              <a:rPr lang="zh-CN" altLang="en-US" b="1" dirty="0" smtClean="0">
+              <a:rPr lang="zh-CN" altLang="en-US" b="1" dirty="0">
                 <a:solidFill>
                   <a:srgbClr val="002060"/>
                 </a:solidFill>
@@ -3227,7 +3225,7 @@
               <a:t>羅 </a:t>
             </a:r>
             <a:r>
-              <a:rPr lang="en-US" altLang="zh-CN" b="1" dirty="0" smtClean="0">
+              <a:rPr lang="en-US" altLang="zh-CN" b="1" dirty="0">
                 <a:solidFill>
                   <a:srgbClr val="002060"/>
                 </a:solidFill>
@@ -3304,20 +3302,10 @@
                 <a:latin typeface="微軟正黑體" pitchFamily="34" charset="-120"/>
                 <a:ea typeface="微軟正黑體" pitchFamily="34" charset="-120"/>
               </a:rPr>
-              <a:t>；</a:t>
-            </a:r>
-            <a:r>
-              <a:rPr lang="zh-CN" altLang="en-US" b="1" dirty="0" smtClean="0">
-                <a:solidFill>
-                  <a:srgbClr val="002060"/>
-                </a:solidFill>
-                <a:latin typeface="微軟正黑體" pitchFamily="34" charset="-120"/>
-                <a:ea typeface="微軟正黑體" pitchFamily="34" charset="-120"/>
-              </a:rPr>
-              <a:t>賽 </a:t>
-            </a:r>
-            <a:r>
-              <a:rPr lang="en-US" altLang="zh-CN" b="1" dirty="0" smtClean="0">
+              <a:t>；賽 </a:t>
+            </a:r>
+            <a:r>
+              <a:rPr lang="en-US" altLang="zh-CN" b="1" dirty="0">
                 <a:solidFill>
                   <a:srgbClr val="002060"/>
                 </a:solidFill>
@@ -3337,7 +3325,7 @@
               <a:t>：</a:t>
             </a:r>
             <a:r>
-              <a:rPr lang="en-US" altLang="zh-CN" b="1" dirty="0" smtClean="0">
+              <a:rPr lang="en-US" altLang="zh-CN" b="1" dirty="0">
                 <a:solidFill>
                   <a:srgbClr val="002060"/>
                 </a:solidFill>
@@ -3349,7 +3337,7 @@
           </a:p>
           <a:p>
             <a:r>
-              <a:rPr lang="zh-CN" altLang="en-US" b="1" dirty="0" smtClean="0">
+              <a:rPr lang="zh-CN" altLang="en-US" b="1" dirty="0">
                 <a:solidFill>
                   <a:srgbClr val="002060"/>
                 </a:solidFill>
@@ -3359,7 +3347,7 @@
               <a:t>腓 </a:t>
             </a:r>
             <a:r>
-              <a:rPr lang="en-US" altLang="zh-CN" b="1" dirty="0" smtClean="0">
+              <a:rPr lang="en-US" altLang="zh-CN" b="1" dirty="0">
                 <a:solidFill>
                   <a:srgbClr val="002060"/>
                 </a:solidFill>
@@ -3379,7 +3367,7 @@
               <a:t>：</a:t>
             </a:r>
             <a:r>
-              <a:rPr lang="en-US" altLang="zh-CN" b="1" dirty="0" smtClean="0">
+              <a:rPr lang="en-US" altLang="zh-CN" b="1" dirty="0">
                 <a:solidFill>
                   <a:srgbClr val="002060"/>
                 </a:solidFill>
@@ -3389,7 +3377,7 @@
               <a:t>6 – 7</a:t>
             </a:r>
             <a:r>
-              <a:rPr lang="zh-CN" altLang="en-US" b="1" dirty="0" smtClean="0">
+              <a:rPr lang="zh-CN" altLang="en-US" b="1" dirty="0">
                 <a:solidFill>
                   <a:srgbClr val="002060"/>
                 </a:solidFill>
@@ -3399,7 +3387,7 @@
               <a:t>；來 </a:t>
             </a:r>
             <a:r>
-              <a:rPr lang="en-US" altLang="zh-CN" b="1" dirty="0" smtClean="0">
+              <a:rPr lang="en-US" altLang="zh-CN" b="1" dirty="0">
                 <a:solidFill>
                   <a:srgbClr val="002060"/>
                 </a:solidFill>
@@ -3419,7 +3407,7 @@
               <a:t>：</a:t>
             </a:r>
             <a:r>
-              <a:rPr lang="en-US" altLang="zh-CN" b="1" dirty="0" smtClean="0">
+              <a:rPr lang="en-US" altLang="zh-CN" b="1" dirty="0">
                 <a:solidFill>
                   <a:srgbClr val="002060"/>
                 </a:solidFill>
@@ -3428,13 +3416,6 @@
               </a:rPr>
               <a:t>20 – 21</a:t>
             </a:r>
-            <a:endParaRPr lang="en-US" altLang="zh-CN" b="1" dirty="0">
-              <a:solidFill>
-                <a:srgbClr val="002060"/>
-              </a:solidFill>
-              <a:latin typeface="微軟正黑體" pitchFamily="34" charset="-120"/>
-              <a:ea typeface="微軟正黑體" pitchFamily="34" charset="-120"/>
-            </a:endParaRPr>
           </a:p>
         </p:txBody>
       </p:sp>
@@ -3443,13 +3424,6 @@
   <p:clrMapOvr>
     <a:masterClrMapping/>
   </p:clrMapOvr>
-  <p:timing>
-    <p:tnLst>
-      <p:par>
-        <p:cTn id="1" dur="indefinite" restart="never" nodeType="tmRoot"/>
-      </p:par>
-    </p:tnLst>
-  </p:timing>
 </p:sld>
 </file>
 
@@ -3541,13 +3515,6 @@
   <p:clrMapOvr>
     <a:masterClrMapping/>
   </p:clrMapOvr>
-  <p:timing>
-    <p:tnLst>
-      <p:par>
-        <p:cTn id="1" dur="indefinite" restart="never" nodeType="tmRoot"/>
-      </p:par>
-    </p:tnLst>
-  </p:timing>
 </p:sld>
 </file>
 
@@ -3623,13 +3590,6 @@
   <p:clrMapOvr>
     <a:masterClrMapping/>
   </p:clrMapOvr>
-  <p:timing>
-    <p:tnLst>
-      <p:par>
-        <p:cTn id="1" dur="indefinite" restart="never" nodeType="tmRoot"/>
-      </p:par>
-    </p:tnLst>
-  </p:timing>
 </p:sld>
 </file>
 
@@ -3673,24 +3633,14 @@
           <a:lstStyle/>
           <a:p>
             <a:r>
-              <a:rPr lang="zh-TW" altLang="en-US" sz="6400" b="1" dirty="0" smtClean="0">
+              <a:rPr lang="zh-TW" altLang="en-US" sz="6400" b="1" dirty="0">
                 <a:solidFill>
                   <a:srgbClr val="002060"/>
                 </a:solidFill>
                 <a:latin typeface="Microsoft JhengHei" pitchFamily="34" charset="-120"/>
                 <a:ea typeface="Microsoft JhengHei" pitchFamily="34" charset="-120"/>
               </a:rPr>
-              <a:t>應</a:t>
-            </a:r>
-            <a:r>
-              <a:rPr lang="zh-TW" altLang="en-US" sz="6400" b="1" dirty="0">
-                <a:solidFill>
-                  <a:srgbClr val="002060"/>
-                </a:solidFill>
-                <a:latin typeface="Microsoft JhengHei" pitchFamily="34" charset="-120"/>
-                <a:ea typeface="Microsoft JhengHei" pitchFamily="34" charset="-120"/>
-              </a:rPr>
-              <a:t>當一無掛慮，只要凡事藉著禱告、祈求，和感謝，將你們所要的告訴神。</a:t>
+              <a:t>應當一無掛慮，只要凡事藉著禱告、祈求，和感謝，將你們所要的告訴神。</a:t>
             </a:r>
             <a:r>
               <a:rPr lang="en-US" altLang="zh-TW" sz="6400" b="1" dirty="0">
@@ -3702,13 +3652,6 @@
               </a:rPr>
               <a:t> </a:t>
             </a:r>
-            <a:endParaRPr lang="en-US" altLang="zh-TW" sz="6400" b="1" dirty="0" smtClean="0">
-              <a:solidFill>
-                <a:srgbClr val="002060"/>
-              </a:solidFill>
-              <a:latin typeface="Microsoft JhengHei" pitchFamily="34" charset="-120"/>
-              <a:ea typeface="Microsoft JhengHei" pitchFamily="34" charset="-120"/>
-            </a:endParaRPr>
           </a:p>
           <a:p>
             <a:r>
@@ -3751,13 +3694,6 @@
   <p:clrMapOvr>
     <a:masterClrMapping/>
   </p:clrMapOvr>
-  <p:timing>
-    <p:tnLst>
-      <p:par>
-        <p:cTn id="1" dur="indefinite" restart="never" nodeType="tmRoot"/>
-      </p:par>
-    </p:tnLst>
-  </p:timing>
 </p:sld>
 </file>
 
@@ -3791,17 +3727,17 @@
         <p:spPr>
           <a:xfrm>
             <a:off x="0" y="0"/>
-            <a:ext cx="12192000" cy="6858000"/>
+            <a:ext cx="11684000" cy="6858000"/>
           </a:xfrm>
         </p:spPr>
         <p:txBody>
-          <a:bodyPr>
+          <a:bodyPr anchor="ctr">
             <a:noAutofit/>
           </a:bodyPr>
           <a:lstStyle/>
           <a:p>
             <a:r>
-              <a:rPr lang="zh-TW" altLang="en-US" sz="6400" b="1" dirty="0">
+              <a:rPr lang="zh-TW" altLang="en-US" sz="5867" b="1" dirty="0">
                 <a:solidFill>
                   <a:srgbClr val="002060"/>
                 </a:solidFill>
@@ -3811,7 +3747,7 @@
               <a:t>但願賜平安的神，就是那憑永約之血、使群羊的大牧人我主耶穌從死裡復活的神，在各樣善事上成全你們，叫你們遵行他的旨意；又藉著耶穌基督在你們心裡行他所喜悅的事。願榮耀歸給他，直到永永遠遠。阿們！</a:t>
             </a:r>
             <a:r>
-              <a:rPr lang="en-US" altLang="zh-TW" sz="6400" b="1" dirty="0">
+              <a:rPr lang="en-US" altLang="zh-TW" sz="5867" b="1" dirty="0">
                 <a:solidFill>
                   <a:srgbClr val="002060"/>
                 </a:solidFill>
@@ -3826,20 +3762,13 @@
     </p:spTree>
     <p:extLst>
       <p:ext uri="{BB962C8B-B14F-4D97-AF65-F5344CB8AC3E}">
-        <p14:creationId xmlns:p14="http://schemas.microsoft.com/office/powerpoint/2010/main" val="818587300"/>
+        <p14:creationId xmlns:p14="http://schemas.microsoft.com/office/powerpoint/2010/main" val="3949661026"/>
       </p:ext>
     </p:extLst>
   </p:cSld>
   <p:clrMapOvr>
     <a:masterClrMapping/>
   </p:clrMapOvr>
-  <p:timing>
-    <p:tnLst>
-      <p:par>
-        <p:cTn id="1" dur="indefinite" restart="never" nodeType="tmRoot"/>
-      </p:par>
-    </p:tnLst>
-  </p:timing>
 </p:sld>
 </file>
 
